--- a/Course_Roadmap_Overview.pptx
+++ b/Course_Roadmap_Overview.pptx
@@ -1057,20 +1057,40 @@
         </p:nvSpPr>
         <p:spPr>
           <a:xfrm>
-            <a:off x="457200" y="1481328"/>
-            <a:ext cx="10515600" cy="365760"/>
-          </a:xfrm>
-          <a:prstGeom prst="rect">
-            <a:avLst/>
-          </a:prstGeom>
-          <a:noFill/>
-          <a:ln/>
-        </p:spPr>
-        <p:txBody>
-          <a:bodyPr wrap="square" lIns="0" tIns="0" rIns="0" bIns="0" rtlCol="0" anchor="ctr"/>
+            <a:off x="457200" y="1444752"/>
+            <a:ext cx="10881360" cy="402336"/>
+          </a:xfrm>
+          <a:prstGeom prst="rect">
+            <a:avLst/>
+          </a:prstGeom>
+          <a:noFill/>
+          <a:ln/>
+        </p:spPr>
+        <p:txBody>
+          <a:bodyPr wrap="square" lIns="0" tIns="0" rIns="0" bIns="0" rtlCol="0" anchor="t"/>
           <a:lstStyle/>
           <a:p>
             <a:pPr indent="0" marL="0">
+              <a:lnSpc>
+                <a:spcPct val="110000"/>
+              </a:lnSpc>
+              <a:buNone/>
+            </a:pPr>
+            <a:r>
+              <a:rPr lang="en-US" sz="1450" b="1" dirty="0">
+                <a:solidFill>
+                  <a:srgbClr val="D31242"/>
+                </a:solidFill>
+                <a:latin typeface="Arial" pitchFamily="34" charset="0"/>
+                <a:ea typeface="Arial" pitchFamily="34" charset="-122"/>
+                <a:cs typeface="Arial" pitchFamily="34" charset="-120"/>
+              </a:rPr>
+              <a:t>Why this course:  </a:t>
+            </a:r>
+            <a:pPr indent="0" marL="0">
+              <a:lnSpc>
+                <a:spcPct val="110000"/>
+              </a:lnSpc>
               <a:buNone/>
             </a:pPr>
             <a:r>
@@ -1082,7 +1102,7 @@
                 <a:ea typeface="Arial" pitchFamily="34" charset="-122"/>
                 <a:cs typeface="Arial" pitchFamily="34" charset="-120"/>
               </a:rPr>
-              <a:t>From a clear instruction to safe, reusable prompt systems — the full path to using AI well at BJ's.</a:t>
+              <a:t>to help you get more out of AI in everyday work — by learning plain, practical ways to ask any AI tool for exactly what you need, and to trust what it gives back.</a:t>
             </a:r>
             <a:endParaRPr lang="en-US" sz="1450" dirty="0"/>
           </a:p>
@@ -1096,8 +1116,8 @@
         </p:nvSpPr>
         <p:spPr>
           <a:xfrm>
-            <a:off x="457200" y="1883664"/>
-            <a:ext cx="10515600" cy="292608"/>
+            <a:off x="457200" y="1901952"/>
+            <a:ext cx="10881360" cy="292608"/>
           </a:xfrm>
           <a:prstGeom prst="rect">
             <a:avLst/>
@@ -1121,7 +1141,7 @@
                 <a:ea typeface="Arial" pitchFamily="34" charset="-122"/>
                 <a:cs typeface="Arial" pitchFamily="34" charset="-120"/>
               </a:rPr>
-              <a:t>Four levels · fifteen modules — each level builds on the one before.</a:t>
+              <a:t>From your first clear request to handling real, multi-step work — each level builds on the one before.</a:t>
             </a:r>
             <a:endParaRPr lang="en-US" sz="1250" dirty="0"/>
           </a:p>
